--- a/Workspaces/Work/Projects/PPL CMDB-CSDM/Backlog/Implementation-Structure-Pilot-Features-2026-10-15.pptx
+++ b/Workspaces/Work/Projects/PPL CMDB-CSDM/Backlog/Implementation-Structure-Pilot-Features-2026-10-15.pptx
@@ -4782,7 +4782,7 @@
           <a:bodyPr rtlCol="0" anchor="t" wrap="square" lIns="164592" rIns="164592" tIns="128016"/>
           <a:lstStyle/>
           <a:p>
-            <a:pPr algn="ctr"/>
+            <a:pPr algn="l"/>
             <a:r>
               <a:rPr sz="1150" b="1">
                 <a:solidFill>
@@ -4794,6 +4794,7 @@
             </a:r>
           </a:p>
           <a:p>
+            <a:pPr algn="l"/>
             <a:r>
               <a:rPr sz="1000">
                 <a:solidFill>
@@ -4850,7 +4851,7 @@
           <a:bodyPr rtlCol="0" anchor="t" wrap="square" lIns="164592" rIns="164592" tIns="128016"/>
           <a:lstStyle/>
           <a:p>
-            <a:pPr algn="ctr"/>
+            <a:pPr algn="l"/>
             <a:r>
               <a:rPr sz="1150" b="1">
                 <a:solidFill>
@@ -4862,6 +4863,7 @@
             </a:r>
           </a:p>
           <a:p>
+            <a:pPr algn="l"/>
             <a:r>
               <a:rPr sz="1000">
                 <a:solidFill>
@@ -4918,7 +4920,7 @@
           <a:bodyPr rtlCol="0" anchor="t" wrap="square" lIns="164592" rIns="164592" tIns="128016"/>
           <a:lstStyle/>
           <a:p>
-            <a:pPr algn="ctr"/>
+            <a:pPr algn="l"/>
             <a:r>
               <a:rPr sz="1150" b="1">
                 <a:solidFill>
@@ -4930,6 +4932,7 @@
             </a:r>
           </a:p>
           <a:p>
+            <a:pPr algn="l"/>
             <a:r>
               <a:rPr sz="1000">
                 <a:solidFill>
@@ -4986,7 +4989,7 @@
           <a:bodyPr rtlCol="0" anchor="ctr" wrap="square" lIns="182880" rIns="182880" tIns="109728"/>
           <a:lstStyle/>
           <a:p>
-            <a:pPr algn="ctr"/>
+            <a:pPr algn="l"/>
             <a:r>
               <a:rPr sz="1150" b="1">
                 <a:solidFill>
@@ -4998,6 +5001,7 @@
             </a:r>
           </a:p>
           <a:p>
+            <a:pPr algn="l"/>
             <a:r>
               <a:rPr sz="1000" b="0">
                 <a:solidFill>
